--- a/informe/Pitch_Defensa.pptx
+++ b/informe/Pitch_Defensa.pptx
@@ -5,19 +5,19 @@
     <p:sldMasterId id="2147483648" r:id="rId1"/>
   </p:sldMasterIdLst>
   <p:sldIdLst>
-    <p:sldId id="256" r:id="rId7"/>
-    <p:sldId id="257" r:id="rId8"/>
-    <p:sldId id="258" r:id="rId9"/>
-    <p:sldId id="259" r:id="rId10"/>
-    <p:sldId id="260" r:id="rId11"/>
-    <p:sldId id="261" r:id="rId12"/>
-    <p:sldId id="262" r:id="rId13"/>
-    <p:sldId id="263" r:id="rId14"/>
-    <p:sldId id="264" r:id="rId15"/>
-    <p:sldId id="265" r:id="rId16"/>
-    <p:sldId id="266" r:id="rId17"/>
+    <p:sldId id="256" r:id="rId2"/>
+    <p:sldId id="257" r:id="rId3"/>
+    <p:sldId id="258" r:id="rId4"/>
+    <p:sldId id="259" r:id="rId5"/>
+    <p:sldId id="260" r:id="rId6"/>
+    <p:sldId id="261" r:id="rId7"/>
+    <p:sldId id="262" r:id="rId8"/>
+    <p:sldId id="263" r:id="rId9"/>
+    <p:sldId id="264" r:id="rId10"/>
+    <p:sldId id="265" r:id="rId11"/>
+    <p:sldId id="266" r:id="rId12"/>
   </p:sldIdLst>
-  <p:sldSz cx="12191695" cy="6858000" type="screen4x3"/>
+  <p:sldSz cx="12192000" cy="6858000"/>
   <p:notesSz cx="6858000" cy="9144000"/>
   <p:defaultTextStyle>
     <a:defPPr>
@@ -114,7 +114,52 @@
       </a:defRPr>
     </a:lvl9pPr>
   </p:defaultTextStyle>
+  <p:extLst>
+    <p:ext uri="{EFAFB233-063F-42B5-8137-9DF3F51BA10A}">
+      <p15:sldGuideLst xmlns:p15="http://schemas.microsoft.com/office/powerpoint/2012/main">
+        <p15:guide id="1" orient="horz" pos="2160">
+          <p15:clr>
+            <a:srgbClr val="A4A3A4"/>
+          </p15:clr>
+        </p15:guide>
+        <p15:guide id="2" pos="2880">
+          <p15:clr>
+            <a:srgbClr val="A4A3A4"/>
+          </p15:clr>
+        </p15:guide>
+      </p15:sldGuideLst>
+    </p:ext>
+  </p:extLst>
 </p:presentation>
+</file>
+
+<file path=ppt/changesInfos/changesInfo1.xml><?xml version="1.0" encoding="utf-8"?>
+<pc:chgInfo xmlns:a="http://schemas.openxmlformats.org/drawingml/2006/main" xmlns:r="http://schemas.openxmlformats.org/officeDocument/2006/relationships" xmlns:ac="http://schemas.microsoft.com/office/drawing/2013/main/command" xmlns:pc="http://schemas.microsoft.com/office/powerpoint/2013/main/command">
+  <pc:docChgLst>
+    <pc:chgData name="MENOSCAL SANTANA BRYAN STEVEN" userId="e87893df-7e30-49f6-91b5-01c9396b035d" providerId="ADAL" clId="{FED3B733-5B06-40A5-AF15-DBC1A1DA9DD3}"/>
+    <pc:docChg chg="custSel modSld">
+      <pc:chgData name="MENOSCAL SANTANA BRYAN STEVEN" userId="e87893df-7e30-49f6-91b5-01c9396b035d" providerId="ADAL" clId="{FED3B733-5B06-40A5-AF15-DBC1A1DA9DD3}" dt="2026-07-06T02:30:23.315" v="13" actId="3626"/>
+      <pc:docMkLst>
+        <pc:docMk/>
+      </pc:docMkLst>
+      <pc:sldChg chg="modSp mod">
+        <pc:chgData name="MENOSCAL SANTANA BRYAN STEVEN" userId="e87893df-7e30-49f6-91b5-01c9396b035d" providerId="ADAL" clId="{FED3B733-5B06-40A5-AF15-DBC1A1DA9DD3}" dt="2026-07-06T02:30:23.315" v="13" actId="3626"/>
+        <pc:sldMkLst>
+          <pc:docMk/>
+          <pc:sldMk cId="0" sldId="256"/>
+        </pc:sldMkLst>
+        <pc:spChg chg="mod">
+          <ac:chgData name="MENOSCAL SANTANA BRYAN STEVEN" userId="e87893df-7e30-49f6-91b5-01c9396b035d" providerId="ADAL" clId="{FED3B733-5B06-40A5-AF15-DBC1A1DA9DD3}" dt="2026-07-06T02:30:23.315" v="13" actId="3626"/>
+          <ac:spMkLst>
+            <pc:docMk/>
+            <pc:sldMk cId="0" sldId="256"/>
+            <ac:spMk id="6" creationId="{00000000-0000-0000-0000-000000000000}"/>
+          </ac:spMkLst>
+        </pc:spChg>
+      </pc:sldChg>
+    </pc:docChg>
+  </pc:docChgLst>
+</pc:chgInfo>
 </file>
 
 <file path=ppt/slideLayouts/slideLayout1.xml><?xml version="1.0" encoding="utf-8"?>
@@ -155,10 +200,9 @@
           <a:lstStyle/>
           <a:p>
             <a:r>
-              <a:rPr lang="en-US" smtClean="0"/>
+              <a:rPr lang="en-US"/>
               <a:t>Click to edit Master title style</a:t>
             </a:r>
-            <a:endParaRPr lang="en-US"/>
           </a:p>
         </p:txBody>
       </p:sp>
@@ -274,10 +318,9 @@
           </a:lstStyle>
           <a:p>
             <a:r>
-              <a:rPr lang="en-US" smtClean="0"/>
+              <a:rPr lang="en-US"/>
               <a:t>Click to edit Master subtitle style</a:t>
             </a:r>
-            <a:endParaRPr lang="en-US"/>
           </a:p>
         </p:txBody>
       </p:sp>
@@ -298,7 +341,7 @@
           <a:p>
             <a:fld id="{5BCAD085-E8A6-8845-BD4E-CB4CCA059FC4}" type="datetimeFigureOut">
               <a:rPr lang="en-US" smtClean="0"/>
-              <a:t>1/27/13</a:t>
+              <a:t>7/5/2026</a:t>
             </a:fld>
             <a:endParaRPr lang="en-US"/>
           </a:p>
@@ -392,10 +435,9 @@
           <a:lstStyle/>
           <a:p>
             <a:r>
-              <a:rPr lang="en-US" smtClean="0"/>
+              <a:rPr lang="en-US"/>
               <a:t>Click to edit Master title style</a:t>
             </a:r>
-            <a:endParaRPr lang="en-US"/>
           </a:p>
         </p:txBody>
       </p:sp>
@@ -416,38 +458,37 @@
           <a:p>
             <a:pPr lvl="0"/>
             <a:r>
-              <a:rPr lang="en-US" smtClean="0"/>
+              <a:rPr lang="en-US"/>
               <a:t>Click to edit Master text styles</a:t>
             </a:r>
           </a:p>
           <a:p>
             <a:pPr lvl="1"/>
             <a:r>
-              <a:rPr lang="en-US" smtClean="0"/>
+              <a:rPr lang="en-US"/>
               <a:t>Second level</a:t>
             </a:r>
           </a:p>
           <a:p>
             <a:pPr lvl="2"/>
             <a:r>
-              <a:rPr lang="en-US" smtClean="0"/>
+              <a:rPr lang="en-US"/>
               <a:t>Third level</a:t>
             </a:r>
           </a:p>
           <a:p>
             <a:pPr lvl="3"/>
             <a:r>
-              <a:rPr lang="en-US" smtClean="0"/>
+              <a:rPr lang="en-US"/>
               <a:t>Fourth level</a:t>
             </a:r>
           </a:p>
           <a:p>
             <a:pPr lvl="4"/>
             <a:r>
-              <a:rPr lang="en-US" smtClean="0"/>
+              <a:rPr lang="en-US"/>
               <a:t>Fifth level</a:t>
             </a:r>
-            <a:endParaRPr lang="en-US"/>
           </a:p>
         </p:txBody>
       </p:sp>
@@ -468,7 +509,7 @@
           <a:p>
             <a:fld id="{5BCAD085-E8A6-8845-BD4E-CB4CCA059FC4}" type="datetimeFigureOut">
               <a:rPr lang="en-US" smtClean="0"/>
-              <a:t>1/27/13</a:t>
+              <a:t>7/5/2026</a:t>
             </a:fld>
             <a:endParaRPr lang="en-US"/>
           </a:p>
@@ -567,10 +608,9 @@
           <a:lstStyle/>
           <a:p>
             <a:r>
-              <a:rPr lang="en-US" smtClean="0"/>
+              <a:rPr lang="en-US"/>
               <a:t>Click to edit Master title style</a:t>
             </a:r>
-            <a:endParaRPr lang="en-US"/>
           </a:p>
         </p:txBody>
       </p:sp>
@@ -596,38 +636,37 @@
           <a:p>
             <a:pPr lvl="0"/>
             <a:r>
-              <a:rPr lang="en-US" smtClean="0"/>
+              <a:rPr lang="en-US"/>
               <a:t>Click to edit Master text styles</a:t>
             </a:r>
           </a:p>
           <a:p>
             <a:pPr lvl="1"/>
             <a:r>
-              <a:rPr lang="en-US" smtClean="0"/>
+              <a:rPr lang="en-US"/>
               <a:t>Second level</a:t>
             </a:r>
           </a:p>
           <a:p>
             <a:pPr lvl="2"/>
             <a:r>
-              <a:rPr lang="en-US" smtClean="0"/>
+              <a:rPr lang="en-US"/>
               <a:t>Third level</a:t>
             </a:r>
           </a:p>
           <a:p>
             <a:pPr lvl="3"/>
             <a:r>
-              <a:rPr lang="en-US" smtClean="0"/>
+              <a:rPr lang="en-US"/>
               <a:t>Fourth level</a:t>
             </a:r>
           </a:p>
           <a:p>
             <a:pPr lvl="4"/>
             <a:r>
-              <a:rPr lang="en-US" smtClean="0"/>
+              <a:rPr lang="en-US"/>
               <a:t>Fifth level</a:t>
             </a:r>
-            <a:endParaRPr lang="en-US"/>
           </a:p>
         </p:txBody>
       </p:sp>
@@ -648,7 +687,7 @@
           <a:p>
             <a:fld id="{5BCAD085-E8A6-8845-BD4E-CB4CCA059FC4}" type="datetimeFigureOut">
               <a:rPr lang="en-US" smtClean="0"/>
-              <a:t>1/27/13</a:t>
+              <a:t>7/5/2026</a:t>
             </a:fld>
             <a:endParaRPr lang="en-US"/>
           </a:p>
@@ -742,10 +781,9 @@
           <a:lstStyle/>
           <a:p>
             <a:r>
-              <a:rPr lang="en-US" smtClean="0"/>
+              <a:rPr lang="en-US"/>
               <a:t>Click to edit Master title style</a:t>
             </a:r>
-            <a:endParaRPr lang="en-US"/>
           </a:p>
         </p:txBody>
       </p:sp>
@@ -766,38 +804,37 @@
           <a:p>
             <a:pPr lvl="0"/>
             <a:r>
-              <a:rPr lang="en-US" smtClean="0"/>
+              <a:rPr lang="en-US"/>
               <a:t>Click to edit Master text styles</a:t>
             </a:r>
           </a:p>
           <a:p>
             <a:pPr lvl="1"/>
             <a:r>
-              <a:rPr lang="en-US" smtClean="0"/>
+              <a:rPr lang="en-US"/>
               <a:t>Second level</a:t>
             </a:r>
           </a:p>
           <a:p>
             <a:pPr lvl="2"/>
             <a:r>
-              <a:rPr lang="en-US" smtClean="0"/>
+              <a:rPr lang="en-US"/>
               <a:t>Third level</a:t>
             </a:r>
           </a:p>
           <a:p>
             <a:pPr lvl="3"/>
             <a:r>
-              <a:rPr lang="en-US" smtClean="0"/>
+              <a:rPr lang="en-US"/>
               <a:t>Fourth level</a:t>
             </a:r>
           </a:p>
           <a:p>
             <a:pPr lvl="4"/>
             <a:r>
-              <a:rPr lang="en-US" smtClean="0"/>
+              <a:rPr lang="en-US"/>
               <a:t>Fifth level</a:t>
             </a:r>
-            <a:endParaRPr lang="en-US"/>
           </a:p>
         </p:txBody>
       </p:sp>
@@ -818,7 +855,7 @@
           <a:p>
             <a:fld id="{5BCAD085-E8A6-8845-BD4E-CB4CCA059FC4}" type="datetimeFigureOut">
               <a:rPr lang="en-US" smtClean="0"/>
-              <a:t>1/27/13</a:t>
+              <a:t>7/5/2026</a:t>
             </a:fld>
             <a:endParaRPr lang="en-US"/>
           </a:p>
@@ -921,10 +958,9 @@
           </a:lstStyle>
           <a:p>
             <a:r>
-              <a:rPr lang="en-US" smtClean="0"/>
+              <a:rPr lang="en-US"/>
               <a:t>Click to edit Master title style</a:t>
             </a:r>
-            <a:endParaRPr lang="en-US"/>
           </a:p>
         </p:txBody>
       </p:sp>
@@ -1041,7 +1077,7 @@
           <a:p>
             <a:pPr lvl="0"/>
             <a:r>
-              <a:rPr lang="en-US" smtClean="0"/>
+              <a:rPr lang="en-US"/>
               <a:t>Click to edit Master text styles</a:t>
             </a:r>
           </a:p>
@@ -1064,7 +1100,7 @@
           <a:p>
             <a:fld id="{5BCAD085-E8A6-8845-BD4E-CB4CCA059FC4}" type="datetimeFigureOut">
               <a:rPr lang="en-US" smtClean="0"/>
-              <a:t>1/27/13</a:t>
+              <a:t>7/5/2026</a:t>
             </a:fld>
             <a:endParaRPr lang="en-US"/>
           </a:p>
@@ -1158,10 +1194,9 @@
           <a:lstStyle/>
           <a:p>
             <a:r>
-              <a:rPr lang="en-US" smtClean="0"/>
+              <a:rPr lang="en-US"/>
               <a:t>Click to edit Master title style</a:t>
             </a:r>
-            <a:endParaRPr lang="en-US"/>
           </a:p>
         </p:txBody>
       </p:sp>
@@ -1215,38 +1250,37 @@
           <a:p>
             <a:pPr lvl="0"/>
             <a:r>
-              <a:rPr lang="en-US" smtClean="0"/>
+              <a:rPr lang="en-US"/>
               <a:t>Click to edit Master text styles</a:t>
             </a:r>
           </a:p>
           <a:p>
             <a:pPr lvl="1"/>
             <a:r>
-              <a:rPr lang="en-US" smtClean="0"/>
+              <a:rPr lang="en-US"/>
               <a:t>Second level</a:t>
             </a:r>
           </a:p>
           <a:p>
             <a:pPr lvl="2"/>
             <a:r>
-              <a:rPr lang="en-US" smtClean="0"/>
+              <a:rPr lang="en-US"/>
               <a:t>Third level</a:t>
             </a:r>
           </a:p>
           <a:p>
             <a:pPr lvl="3"/>
             <a:r>
-              <a:rPr lang="en-US" smtClean="0"/>
+              <a:rPr lang="en-US"/>
               <a:t>Fourth level</a:t>
             </a:r>
           </a:p>
           <a:p>
             <a:pPr lvl="4"/>
             <a:r>
-              <a:rPr lang="en-US" smtClean="0"/>
+              <a:rPr lang="en-US"/>
               <a:t>Fifth level</a:t>
             </a:r>
-            <a:endParaRPr lang="en-US"/>
           </a:p>
         </p:txBody>
       </p:sp>
@@ -1300,38 +1334,37 @@
           <a:p>
             <a:pPr lvl="0"/>
             <a:r>
-              <a:rPr lang="en-US" smtClean="0"/>
+              <a:rPr lang="en-US"/>
               <a:t>Click to edit Master text styles</a:t>
             </a:r>
           </a:p>
           <a:p>
             <a:pPr lvl="1"/>
             <a:r>
-              <a:rPr lang="en-US" smtClean="0"/>
+              <a:rPr lang="en-US"/>
               <a:t>Second level</a:t>
             </a:r>
           </a:p>
           <a:p>
             <a:pPr lvl="2"/>
             <a:r>
-              <a:rPr lang="en-US" smtClean="0"/>
+              <a:rPr lang="en-US"/>
               <a:t>Third level</a:t>
             </a:r>
           </a:p>
           <a:p>
             <a:pPr lvl="3"/>
             <a:r>
-              <a:rPr lang="en-US" smtClean="0"/>
+              <a:rPr lang="en-US"/>
               <a:t>Fourth level</a:t>
             </a:r>
           </a:p>
           <a:p>
             <a:pPr lvl="4"/>
             <a:r>
-              <a:rPr lang="en-US" smtClean="0"/>
+              <a:rPr lang="en-US"/>
               <a:t>Fifth level</a:t>
             </a:r>
-            <a:endParaRPr lang="en-US"/>
           </a:p>
         </p:txBody>
       </p:sp>
@@ -1352,7 +1385,7 @@
           <a:p>
             <a:fld id="{5BCAD085-E8A6-8845-BD4E-CB4CCA059FC4}" type="datetimeFigureOut">
               <a:rPr lang="en-US" smtClean="0"/>
-              <a:t>1/27/13</a:t>
+              <a:t>7/5/2026</a:t>
             </a:fld>
             <a:endParaRPr lang="en-US"/>
           </a:p>
@@ -1450,10 +1483,9 @@
           </a:lstStyle>
           <a:p>
             <a:r>
-              <a:rPr lang="en-US" smtClean="0"/>
+              <a:rPr lang="en-US"/>
               <a:t>Click to edit Master title style</a:t>
             </a:r>
-            <a:endParaRPr lang="en-US"/>
           </a:p>
         </p:txBody>
       </p:sp>
@@ -1516,7 +1548,7 @@
           <a:p>
             <a:pPr lvl="0"/>
             <a:r>
-              <a:rPr lang="en-US" smtClean="0"/>
+              <a:rPr lang="en-US"/>
               <a:t>Click to edit Master text styles</a:t>
             </a:r>
           </a:p>
@@ -1572,38 +1604,37 @@
           <a:p>
             <a:pPr lvl="0"/>
             <a:r>
-              <a:rPr lang="en-US" smtClean="0"/>
+              <a:rPr lang="en-US"/>
               <a:t>Click to edit Master text styles</a:t>
             </a:r>
           </a:p>
           <a:p>
             <a:pPr lvl="1"/>
             <a:r>
-              <a:rPr lang="en-US" smtClean="0"/>
+              <a:rPr lang="en-US"/>
               <a:t>Second level</a:t>
             </a:r>
           </a:p>
           <a:p>
             <a:pPr lvl="2"/>
             <a:r>
-              <a:rPr lang="en-US" smtClean="0"/>
+              <a:rPr lang="en-US"/>
               <a:t>Third level</a:t>
             </a:r>
           </a:p>
           <a:p>
             <a:pPr lvl="3"/>
             <a:r>
-              <a:rPr lang="en-US" smtClean="0"/>
+              <a:rPr lang="en-US"/>
               <a:t>Fourth level</a:t>
             </a:r>
           </a:p>
           <a:p>
             <a:pPr lvl="4"/>
             <a:r>
-              <a:rPr lang="en-US" smtClean="0"/>
+              <a:rPr lang="en-US"/>
               <a:t>Fifth level</a:t>
             </a:r>
-            <a:endParaRPr lang="en-US"/>
           </a:p>
         </p:txBody>
       </p:sp>
@@ -1666,7 +1697,7 @@
           <a:p>
             <a:pPr lvl="0"/>
             <a:r>
-              <a:rPr lang="en-US" smtClean="0"/>
+              <a:rPr lang="en-US"/>
               <a:t>Click to edit Master text styles</a:t>
             </a:r>
           </a:p>
@@ -1722,38 +1753,37 @@
           <a:p>
             <a:pPr lvl="0"/>
             <a:r>
-              <a:rPr lang="en-US" smtClean="0"/>
+              <a:rPr lang="en-US"/>
               <a:t>Click to edit Master text styles</a:t>
             </a:r>
           </a:p>
           <a:p>
             <a:pPr lvl="1"/>
             <a:r>
-              <a:rPr lang="en-US" smtClean="0"/>
+              <a:rPr lang="en-US"/>
               <a:t>Second level</a:t>
             </a:r>
           </a:p>
           <a:p>
             <a:pPr lvl="2"/>
             <a:r>
-              <a:rPr lang="en-US" smtClean="0"/>
+              <a:rPr lang="en-US"/>
               <a:t>Third level</a:t>
             </a:r>
           </a:p>
           <a:p>
             <a:pPr lvl="3"/>
             <a:r>
-              <a:rPr lang="en-US" smtClean="0"/>
+              <a:rPr lang="en-US"/>
               <a:t>Fourth level</a:t>
             </a:r>
           </a:p>
           <a:p>
             <a:pPr lvl="4"/>
             <a:r>
-              <a:rPr lang="en-US" smtClean="0"/>
+              <a:rPr lang="en-US"/>
               <a:t>Fifth level</a:t>
             </a:r>
-            <a:endParaRPr lang="en-US"/>
           </a:p>
         </p:txBody>
       </p:sp>
@@ -1774,7 +1804,7 @@
           <a:p>
             <a:fld id="{5BCAD085-E8A6-8845-BD4E-CB4CCA059FC4}" type="datetimeFigureOut">
               <a:rPr lang="en-US" smtClean="0"/>
-              <a:t>1/27/13</a:t>
+              <a:t>7/5/2026</a:t>
             </a:fld>
             <a:endParaRPr lang="en-US"/>
           </a:p>
@@ -1868,10 +1898,9 @@
           <a:lstStyle/>
           <a:p>
             <a:r>
-              <a:rPr lang="en-US" smtClean="0"/>
+              <a:rPr lang="en-US"/>
               <a:t>Click to edit Master title style</a:t>
             </a:r>
-            <a:endParaRPr lang="en-US"/>
           </a:p>
         </p:txBody>
       </p:sp>
@@ -1892,7 +1921,7 @@
           <a:p>
             <a:fld id="{5BCAD085-E8A6-8845-BD4E-CB4CCA059FC4}" type="datetimeFigureOut">
               <a:rPr lang="en-US" smtClean="0"/>
-              <a:t>1/27/13</a:t>
+              <a:t>7/5/2026</a:t>
             </a:fld>
             <a:endParaRPr lang="en-US"/>
           </a:p>
@@ -1987,7 +2016,7 @@
           <a:p>
             <a:fld id="{5BCAD085-E8A6-8845-BD4E-CB4CCA059FC4}" type="datetimeFigureOut">
               <a:rPr lang="en-US" smtClean="0"/>
-              <a:t>1/27/13</a:t>
+              <a:t>7/5/2026</a:t>
             </a:fld>
             <a:endParaRPr lang="en-US"/>
           </a:p>
@@ -2090,10 +2119,9 @@
           </a:lstStyle>
           <a:p>
             <a:r>
-              <a:rPr lang="en-US" smtClean="0"/>
+              <a:rPr lang="en-US"/>
               <a:t>Click to edit Master title style</a:t>
             </a:r>
-            <a:endParaRPr lang="en-US"/>
           </a:p>
         </p:txBody>
       </p:sp>
@@ -2147,38 +2175,37 @@
           <a:p>
             <a:pPr lvl="0"/>
             <a:r>
-              <a:rPr lang="en-US" smtClean="0"/>
+              <a:rPr lang="en-US"/>
               <a:t>Click to edit Master text styles</a:t>
             </a:r>
           </a:p>
           <a:p>
             <a:pPr lvl="1"/>
             <a:r>
-              <a:rPr lang="en-US" smtClean="0"/>
+              <a:rPr lang="en-US"/>
               <a:t>Second level</a:t>
             </a:r>
           </a:p>
           <a:p>
             <a:pPr lvl="2"/>
             <a:r>
-              <a:rPr lang="en-US" smtClean="0"/>
+              <a:rPr lang="en-US"/>
               <a:t>Third level</a:t>
             </a:r>
           </a:p>
           <a:p>
             <a:pPr lvl="3"/>
             <a:r>
-              <a:rPr lang="en-US" smtClean="0"/>
+              <a:rPr lang="en-US"/>
               <a:t>Fourth level</a:t>
             </a:r>
           </a:p>
           <a:p>
             <a:pPr lvl="4"/>
             <a:r>
-              <a:rPr lang="en-US" smtClean="0"/>
+              <a:rPr lang="en-US"/>
               <a:t>Fifth level</a:t>
             </a:r>
-            <a:endParaRPr lang="en-US"/>
           </a:p>
         </p:txBody>
       </p:sp>
@@ -2241,7 +2268,7 @@
           <a:p>
             <a:pPr lvl="0"/>
             <a:r>
-              <a:rPr lang="en-US" smtClean="0"/>
+              <a:rPr lang="en-US"/>
               <a:t>Click to edit Master text styles</a:t>
             </a:r>
           </a:p>
@@ -2264,7 +2291,7 @@
           <a:p>
             <a:fld id="{5BCAD085-E8A6-8845-BD4E-CB4CCA059FC4}" type="datetimeFigureOut">
               <a:rPr lang="en-US" smtClean="0"/>
-              <a:t>1/27/13</a:t>
+              <a:t>7/5/2026</a:t>
             </a:fld>
             <a:endParaRPr lang="en-US"/>
           </a:p>
@@ -2367,10 +2394,9 @@
           </a:lstStyle>
           <a:p>
             <a:r>
-              <a:rPr lang="en-US" smtClean="0"/>
+              <a:rPr lang="en-US"/>
               <a:t>Click to edit Master title style</a:t>
             </a:r>
-            <a:endParaRPr lang="en-US"/>
           </a:p>
         </p:txBody>
       </p:sp>
@@ -2494,7 +2520,7 @@
           <a:p>
             <a:pPr lvl="0"/>
             <a:r>
-              <a:rPr lang="en-US" smtClean="0"/>
+              <a:rPr lang="en-US"/>
               <a:t>Click to edit Master text styles</a:t>
             </a:r>
           </a:p>
@@ -2517,7 +2543,7 @@
           <a:p>
             <a:fld id="{5BCAD085-E8A6-8845-BD4E-CB4CCA059FC4}" type="datetimeFigureOut">
               <a:rPr lang="en-US" smtClean="0"/>
-              <a:t>1/27/13</a:t>
+              <a:t>7/5/2026</a:t>
             </a:fld>
             <a:endParaRPr lang="en-US"/>
           </a:p>
@@ -2626,10 +2652,9 @@
           <a:lstStyle/>
           <a:p>
             <a:r>
-              <a:rPr lang="en-US" smtClean="0"/>
+              <a:rPr lang="en-US"/>
               <a:t>Click to edit Master title style</a:t>
             </a:r>
-            <a:endParaRPr lang="en-US"/>
           </a:p>
         </p:txBody>
       </p:sp>
@@ -2660,38 +2685,37 @@
           <a:p>
             <a:pPr lvl="0"/>
             <a:r>
-              <a:rPr lang="en-US" smtClean="0"/>
+              <a:rPr lang="en-US"/>
               <a:t>Click to edit Master text styles</a:t>
             </a:r>
           </a:p>
           <a:p>
             <a:pPr lvl="1"/>
             <a:r>
-              <a:rPr lang="en-US" smtClean="0"/>
+              <a:rPr lang="en-US"/>
               <a:t>Second level</a:t>
             </a:r>
           </a:p>
           <a:p>
             <a:pPr lvl="2"/>
             <a:r>
-              <a:rPr lang="en-US" smtClean="0"/>
+              <a:rPr lang="en-US"/>
               <a:t>Third level</a:t>
             </a:r>
           </a:p>
           <a:p>
             <a:pPr lvl="3"/>
             <a:r>
-              <a:rPr lang="en-US" smtClean="0"/>
+              <a:rPr lang="en-US"/>
               <a:t>Fourth level</a:t>
             </a:r>
           </a:p>
           <a:p>
             <a:pPr lvl="4"/>
             <a:r>
-              <a:rPr lang="en-US" smtClean="0"/>
+              <a:rPr lang="en-US"/>
               <a:t>Fifth level</a:t>
             </a:r>
-            <a:endParaRPr lang="en-US"/>
           </a:p>
         </p:txBody>
       </p:sp>
@@ -2730,7 +2754,7 @@
           <a:p>
             <a:fld id="{5BCAD085-E8A6-8845-BD4E-CB4CCA059FC4}" type="datetimeFigureOut">
               <a:rPr lang="en-US" smtClean="0"/>
-              <a:t>1/27/13</a:t>
+              <a:t>7/5/2026</a:t>
             </a:fld>
             <a:endParaRPr lang="en-US"/>
           </a:p>
@@ -3089,7 +3113,7 @@
 </file>
 
 <file path=ppt/slides/slide1.xml><?xml version="1.0" encoding="utf-8"?>
-<p:sld xmlns:a="http://schemas.openxmlformats.org/drawingml/2006/main" xmlns:p="http://schemas.openxmlformats.org/presentationml/2006/main" xmlns:r="http://schemas.openxmlformats.org/officeDocument/2006/relationships">
+<p:sld xmlns:a="http://schemas.openxmlformats.org/drawingml/2006/main" xmlns:r="http://schemas.openxmlformats.org/officeDocument/2006/relationships" xmlns:p="http://schemas.openxmlformats.org/presentationml/2006/main">
   <p:cSld>
     <p:bg>
       <p:bgPr>
@@ -3105,7 +3129,14 @@
         <p:cNvGrpSpPr/>
         <p:nvPr/>
       </p:nvGrpSpPr>
-      <p:grpSpPr/>
+      <p:grpSpPr>
+        <a:xfrm>
+          <a:off x="0" y="0"/>
+          <a:ext cx="0" cy="0"/>
+          <a:chOff x="0" y="0"/>
+          <a:chExt cx="0" cy="0"/>
+        </a:xfrm>
+      </p:grpSpPr>
       <p:sp>
         <p:nvSpPr>
           <p:cNvPr id="2" name="Rectangle 1"/>
@@ -3147,6 +3178,7 @@
           <a:lstStyle/>
           <a:p>
             <a:pPr algn="ctr"/>
+            <a:endParaRPr/>
           </a:p>
         </p:txBody>
       </p:sp>
@@ -3292,48 +3324,144 @@
         <p:spPr>
           <a:xfrm>
             <a:off x="914400" y="5120640"/>
-            <a:ext cx="10332720" cy="822960"/>
-          </a:xfrm>
-          <a:prstGeom prst="rect">
-            <a:avLst/>
-          </a:prstGeom>
-          <a:noFill/>
-        </p:spPr>
-        <p:txBody>
-          <a:bodyPr wrap="square">
-            <a:spAutoFit/>
-          </a:bodyPr>
-          <a:lstStyle/>
-          <a:p>
-            <a:pPr algn="l">
-              <a:lnSpc>
-                <a:spcPct val="100000"/>
-              </a:lnSpc>
-            </a:pPr>
-            <a:r>
-              <a:rPr sz="1300" b="0">
+            <a:ext cx="10332720" cy="507831"/>
+          </a:xfrm>
+          <a:prstGeom prst="rect">
+            <a:avLst/>
+          </a:prstGeom>
+          <a:noFill/>
+        </p:spPr>
+        <p:txBody>
+          <a:bodyPr wrap="square">
+            <a:spAutoFit/>
+          </a:bodyPr>
+          <a:lstStyle/>
+          <a:p>
+            <a:pPr algn="l">
+              <a:lnSpc>
+                <a:spcPct val="100000"/>
+              </a:lnSpc>
+            </a:pPr>
+            <a:r>
+              <a:rPr sz="1300" b="0" dirty="0" err="1">
                 <a:solidFill>
                   <a:srgbClr val="E8F2EA"/>
                 </a:solidFill>
                 <a:latin typeface="Segoe UI"/>
               </a:rPr>
-              <a:t>Integrantes:  _____________  ·  _____________  ·  _____________</a:t>
-            </a:r>
-          </a:p>
-          <a:p>
-            <a:pPr algn="l">
-              <a:lnSpc>
-                <a:spcPct val="100000"/>
-              </a:lnSpc>
-            </a:pPr>
-            <a:r>
-              <a:rPr sz="1300" b="0">
+              <a:t>Integrantes</a:t>
+            </a:r>
+            <a:r>
+              <a:rPr sz="1300" b="0" dirty="0">
                 <a:solidFill>
                   <a:srgbClr val="E8F2EA"/>
                 </a:solidFill>
                 <a:latin typeface="Segoe UI"/>
               </a:rPr>
-              <a:t>Docente: Ing. Carlos Manosalvas G.</a:t>
+              <a:t>:  </a:t>
+            </a:r>
+            <a:r>
+              <a:rPr lang="en-US" sz="1100" b="1" i="0" dirty="0">
+                <a:solidFill>
+                  <a:schemeClr val="bg1"/>
+                </a:solidFill>
+                <a:effectLst/>
+                <a:latin typeface="Times New Roman" panose="02020603050405020304" pitchFamily="18" charset="0"/>
+                <a:cs typeface="Times New Roman" panose="02020603050405020304" pitchFamily="18" charset="0"/>
+              </a:rPr>
+              <a:t>CHILE SILVA CARLOS JUNIOR</a:t>
+            </a:r>
+            <a:r>
+              <a:rPr sz="1100" b="0" dirty="0">
+                <a:solidFill>
+                  <a:schemeClr val="bg1"/>
+                </a:solidFill>
+                <a:latin typeface="Times New Roman" panose="02020603050405020304" pitchFamily="18" charset="0"/>
+                <a:cs typeface="Times New Roman" panose="02020603050405020304" pitchFamily="18" charset="0"/>
+              </a:rPr>
+              <a:t>  ·  </a:t>
+            </a:r>
+            <a:r>
+              <a:rPr lang="en-US" sz="1100" b="1" i="0" dirty="0">
+                <a:solidFill>
+                  <a:schemeClr val="bg1"/>
+                </a:solidFill>
+                <a:effectLst/>
+                <a:latin typeface="Times New Roman" panose="02020603050405020304" pitchFamily="18" charset="0"/>
+                <a:cs typeface="Times New Roman" panose="02020603050405020304" pitchFamily="18" charset="0"/>
+              </a:rPr>
+              <a:t>FIGUEROA ARTEAGA LUIS EMILIO</a:t>
+            </a:r>
+            <a:r>
+              <a:rPr sz="1100" b="0" dirty="0">
+                <a:solidFill>
+                  <a:schemeClr val="bg1"/>
+                </a:solidFill>
+                <a:latin typeface="Times New Roman" panose="02020603050405020304" pitchFamily="18" charset="0"/>
+                <a:cs typeface="Times New Roman" panose="02020603050405020304" pitchFamily="18" charset="0"/>
+              </a:rPr>
+              <a:t>  ·  </a:t>
+            </a:r>
+            <a:r>
+              <a:rPr lang="en-US" sz="1100" b="1" i="0" strike="noStrike" dirty="0">
+                <a:solidFill>
+                  <a:schemeClr val="bg1"/>
+                </a:solidFill>
+                <a:effectLst/>
+                <a:latin typeface="Times New Roman" panose="02020603050405020304" pitchFamily="18" charset="0"/>
+                <a:cs typeface="Times New Roman" panose="02020603050405020304" pitchFamily="18" charset="0"/>
+              </a:rPr>
+              <a:t>MENOSCAL SANTANA BRYAN STEVEN</a:t>
+            </a:r>
+            <a:endParaRPr sz="1100" b="0" dirty="0">
+              <a:solidFill>
+                <a:schemeClr val="bg1"/>
+              </a:solidFill>
+              <a:latin typeface="Times New Roman" panose="02020603050405020304" pitchFamily="18" charset="0"/>
+              <a:cs typeface="Times New Roman" panose="02020603050405020304" pitchFamily="18" charset="0"/>
+            </a:endParaRPr>
+          </a:p>
+          <a:p>
+            <a:pPr algn="l">
+              <a:lnSpc>
+                <a:spcPct val="100000"/>
+              </a:lnSpc>
+            </a:pPr>
+            <a:r>
+              <a:rPr sz="1300" b="0" dirty="0" err="1">
+                <a:solidFill>
+                  <a:srgbClr val="E8F2EA"/>
+                </a:solidFill>
+                <a:latin typeface="Segoe UI"/>
+              </a:rPr>
+              <a:t>Docente</a:t>
+            </a:r>
+            <a:r>
+              <a:rPr sz="1300" b="0" dirty="0">
+                <a:solidFill>
+                  <a:srgbClr val="E8F2EA"/>
+                </a:solidFill>
+                <a:latin typeface="Segoe UI"/>
+              </a:rPr>
+              <a:t>: Ing. Carlos </a:t>
+            </a:r>
+            <a:r>
+              <a:rPr sz="1300" b="0" dirty="0" err="1">
+                <a:solidFill>
+                  <a:srgbClr val="E8F2EA"/>
+                </a:solidFill>
+                <a:latin typeface="Segoe UI"/>
+              </a:rPr>
+              <a:t>Manosalvas</a:t>
+            </a:r>
+            <a:r>
+              <a:rPr sz="1300" b="0" dirty="0">
+                <a:solidFill>
+                  <a:srgbClr val="E8F2EA"/>
+                </a:solidFill>
+                <a:latin typeface="Segoe UI"/>
+              </a:rPr>
+              <a:t> G.</a:t>
             </a:r>
           </a:p>
         </p:txBody>
@@ -3347,7 +3475,7 @@
 </file>
 
 <file path=ppt/slides/slide10.xml><?xml version="1.0" encoding="utf-8"?>
-<p:sld xmlns:a="http://schemas.openxmlformats.org/drawingml/2006/main" xmlns:p="http://schemas.openxmlformats.org/presentationml/2006/main" xmlns:r="http://schemas.openxmlformats.org/officeDocument/2006/relationships">
+<p:sld xmlns:a="http://schemas.openxmlformats.org/drawingml/2006/main" xmlns:r="http://schemas.openxmlformats.org/officeDocument/2006/relationships" xmlns:p="http://schemas.openxmlformats.org/presentationml/2006/main">
   <p:cSld>
     <p:bg>
       <p:bgPr>
@@ -3363,7 +3491,14 @@
         <p:cNvGrpSpPr/>
         <p:nvPr/>
       </p:nvGrpSpPr>
-      <p:grpSpPr/>
+      <p:grpSpPr>
+        <a:xfrm>
+          <a:off x="0" y="0"/>
+          <a:ext cx="0" cy="0"/>
+          <a:chOff x="0" y="0"/>
+          <a:chExt cx="0" cy="0"/>
+        </a:xfrm>
+      </p:grpSpPr>
       <p:sp>
         <p:nvSpPr>
           <p:cNvPr id="2" name="Rectangle 1"/>
@@ -3405,6 +3540,7 @@
           <a:lstStyle/>
           <a:p>
             <a:pPr algn="ctr"/>
+            <a:endParaRPr/>
           </a:p>
         </p:txBody>
       </p:sp>
@@ -3527,6 +3663,7 @@
           <a:lstStyle/>
           <a:p>
             <a:pPr algn="ctr"/>
+            <a:endParaRPr/>
           </a:p>
         </p:txBody>
       </p:sp>
@@ -3649,6 +3786,7 @@
           <a:lstStyle/>
           <a:p>
             <a:pPr algn="ctr"/>
+            <a:endParaRPr/>
           </a:p>
         </p:txBody>
       </p:sp>
@@ -3771,6 +3909,7 @@
           <a:lstStyle/>
           <a:p>
             <a:pPr algn="ctr"/>
+            <a:endParaRPr/>
           </a:p>
         </p:txBody>
       </p:sp>
@@ -3893,6 +4032,7 @@
           <a:lstStyle/>
           <a:p>
             <a:pPr algn="ctr"/>
+            <a:endParaRPr/>
           </a:p>
         </p:txBody>
       </p:sp>
@@ -4061,7 +4201,7 @@
 </file>
 
 <file path=ppt/slides/slide11.xml><?xml version="1.0" encoding="utf-8"?>
-<p:sld xmlns:a="http://schemas.openxmlformats.org/drawingml/2006/main" xmlns:p="http://schemas.openxmlformats.org/presentationml/2006/main" xmlns:r="http://schemas.openxmlformats.org/officeDocument/2006/relationships">
+<p:sld xmlns:a="http://schemas.openxmlformats.org/drawingml/2006/main" xmlns:r="http://schemas.openxmlformats.org/officeDocument/2006/relationships" xmlns:p="http://schemas.openxmlformats.org/presentationml/2006/main">
   <p:cSld>
     <p:bg>
       <p:bgPr>
@@ -4077,7 +4217,14 @@
         <p:cNvGrpSpPr/>
         <p:nvPr/>
       </p:nvGrpSpPr>
-      <p:grpSpPr/>
+      <p:grpSpPr>
+        <a:xfrm>
+          <a:off x="0" y="0"/>
+          <a:ext cx="0" cy="0"/>
+          <a:chOff x="0" y="0"/>
+          <a:chExt cx="0" cy="0"/>
+        </a:xfrm>
+      </p:grpSpPr>
       <p:sp>
         <p:nvSpPr>
           <p:cNvPr id="2" name="TextBox 1"/>
@@ -4176,6 +4323,7 @@
           <a:lstStyle/>
           <a:p>
             <a:pPr algn="ctr"/>
+            <a:endParaRPr/>
           </a:p>
         </p:txBody>
       </p:sp>
@@ -4316,6 +4464,7 @@
           <a:lstStyle/>
           <a:p>
             <a:pPr algn="ctr"/>
+            <a:endParaRPr/>
           </a:p>
         </p:txBody>
       </p:sp>
@@ -4456,6 +4605,7 @@
           <a:lstStyle/>
           <a:p>
             <a:pPr algn="ctr"/>
+            <a:endParaRPr/>
           </a:p>
         </p:txBody>
       </p:sp>
@@ -4601,7 +4751,7 @@
 </file>
 
 <file path=ppt/slides/slide2.xml><?xml version="1.0" encoding="utf-8"?>
-<p:sld xmlns:a="http://schemas.openxmlformats.org/drawingml/2006/main" xmlns:p="http://schemas.openxmlformats.org/presentationml/2006/main" xmlns:r="http://schemas.openxmlformats.org/officeDocument/2006/relationships">
+<p:sld xmlns:a="http://schemas.openxmlformats.org/drawingml/2006/main" xmlns:r="http://schemas.openxmlformats.org/officeDocument/2006/relationships" xmlns:p="http://schemas.openxmlformats.org/presentationml/2006/main">
   <p:cSld>
     <p:bg>
       <p:bgPr>
@@ -4617,7 +4767,14 @@
         <p:cNvGrpSpPr/>
         <p:nvPr/>
       </p:nvGrpSpPr>
-      <p:grpSpPr/>
+      <p:grpSpPr>
+        <a:xfrm>
+          <a:off x="0" y="0"/>
+          <a:ext cx="0" cy="0"/>
+          <a:chOff x="0" y="0"/>
+          <a:chExt cx="0" cy="0"/>
+        </a:xfrm>
+      </p:grpSpPr>
       <p:sp>
         <p:nvSpPr>
           <p:cNvPr id="2" name="Rectangle 1"/>
@@ -4659,6 +4816,7 @@
           <a:lstStyle/>
           <a:p>
             <a:pPr algn="ctr"/>
+            <a:endParaRPr/>
           </a:p>
         </p:txBody>
       </p:sp>
@@ -4822,6 +4980,7 @@
           <a:lstStyle/>
           <a:p>
             <a:pPr algn="ctr"/>
+            <a:endParaRPr/>
           </a:p>
         </p:txBody>
       </p:sp>
@@ -4962,6 +5121,7 @@
           <a:lstStyle/>
           <a:p>
             <a:pPr algn="ctr"/>
+            <a:endParaRPr/>
           </a:p>
         </p:txBody>
       </p:sp>
@@ -5102,6 +5262,7 @@
           <a:lstStyle/>
           <a:p>
             <a:pPr algn="ctr"/>
+            <a:endParaRPr/>
           </a:p>
         </p:txBody>
       </p:sp>
@@ -5341,7 +5502,7 @@
 </file>
 
 <file path=ppt/slides/slide3.xml><?xml version="1.0" encoding="utf-8"?>
-<p:sld xmlns:a="http://schemas.openxmlformats.org/drawingml/2006/main" xmlns:p="http://schemas.openxmlformats.org/presentationml/2006/main" xmlns:r="http://schemas.openxmlformats.org/officeDocument/2006/relationships">
+<p:sld xmlns:a="http://schemas.openxmlformats.org/drawingml/2006/main" xmlns:r="http://schemas.openxmlformats.org/officeDocument/2006/relationships" xmlns:p="http://schemas.openxmlformats.org/presentationml/2006/main">
   <p:cSld>
     <p:bg>
       <p:bgPr>
@@ -5357,7 +5518,14 @@
         <p:cNvGrpSpPr/>
         <p:nvPr/>
       </p:nvGrpSpPr>
-      <p:grpSpPr/>
+      <p:grpSpPr>
+        <a:xfrm>
+          <a:off x="0" y="0"/>
+          <a:ext cx="0" cy="0"/>
+          <a:chOff x="0" y="0"/>
+          <a:chExt cx="0" cy="0"/>
+        </a:xfrm>
+      </p:grpSpPr>
       <p:sp>
         <p:nvSpPr>
           <p:cNvPr id="2" name="Rectangle 1"/>
@@ -5399,6 +5567,7 @@
           <a:lstStyle/>
           <a:p>
             <a:pPr algn="ctr"/>
+            <a:endParaRPr/>
           </a:p>
         </p:txBody>
       </p:sp>
@@ -5521,6 +5690,7 @@
           <a:lstStyle/>
           <a:p>
             <a:pPr algn="ctr"/>
+            <a:endParaRPr/>
           </a:p>
         </p:txBody>
       </p:sp>
@@ -5691,6 +5861,7 @@
           <a:lstStyle/>
           <a:p>
             <a:pPr algn="ctr"/>
+            <a:endParaRPr/>
           </a:p>
         </p:txBody>
       </p:sp>
@@ -5861,6 +6032,7 @@
           <a:lstStyle/>
           <a:p>
             <a:pPr algn="ctr"/>
+            <a:endParaRPr/>
           </a:p>
         </p:txBody>
       </p:sp>
@@ -6031,6 +6203,7 @@
           <a:lstStyle/>
           <a:p>
             <a:pPr algn="ctr"/>
+            <a:endParaRPr/>
           </a:p>
         </p:txBody>
       </p:sp>
@@ -6286,7 +6459,7 @@
 </file>
 
 <file path=ppt/slides/slide4.xml><?xml version="1.0" encoding="utf-8"?>
-<p:sld xmlns:a="http://schemas.openxmlformats.org/drawingml/2006/main" xmlns:p="http://schemas.openxmlformats.org/presentationml/2006/main" xmlns:r="http://schemas.openxmlformats.org/officeDocument/2006/relationships">
+<p:sld xmlns:a="http://schemas.openxmlformats.org/drawingml/2006/main" xmlns:r="http://schemas.openxmlformats.org/officeDocument/2006/relationships" xmlns:p="http://schemas.openxmlformats.org/presentationml/2006/main">
   <p:cSld>
     <p:bg>
       <p:bgPr>
@@ -6302,7 +6475,14 @@
         <p:cNvGrpSpPr/>
         <p:nvPr/>
       </p:nvGrpSpPr>
-      <p:grpSpPr/>
+      <p:grpSpPr>
+        <a:xfrm>
+          <a:off x="0" y="0"/>
+          <a:ext cx="0" cy="0"/>
+          <a:chOff x="0" y="0"/>
+          <a:chExt cx="0" cy="0"/>
+        </a:xfrm>
+      </p:grpSpPr>
       <p:sp>
         <p:nvSpPr>
           <p:cNvPr id="2" name="Rectangle 1"/>
@@ -6344,6 +6524,7 @@
           <a:lstStyle/>
           <a:p>
             <a:pPr algn="ctr"/>
+            <a:endParaRPr/>
           </a:p>
         </p:txBody>
       </p:sp>
@@ -6466,6 +6647,7 @@
           <a:lstStyle/>
           <a:p>
             <a:pPr algn="ctr"/>
+            <a:endParaRPr/>
           </a:p>
         </p:txBody>
       </p:sp>
@@ -6588,6 +6770,7 @@
           <a:lstStyle/>
           <a:p>
             <a:pPr algn="ctr"/>
+            <a:endParaRPr/>
           </a:p>
         </p:txBody>
       </p:sp>
@@ -6710,6 +6893,7 @@
           <a:lstStyle/>
           <a:p>
             <a:pPr algn="ctr"/>
+            <a:endParaRPr/>
           </a:p>
         </p:txBody>
       </p:sp>
@@ -6832,6 +7016,7 @@
           <a:lstStyle/>
           <a:p>
             <a:pPr algn="ctr"/>
+            <a:endParaRPr/>
           </a:p>
         </p:txBody>
       </p:sp>
@@ -7000,7 +7185,7 @@
 </file>
 
 <file path=ppt/slides/slide5.xml><?xml version="1.0" encoding="utf-8"?>
-<p:sld xmlns:a="http://schemas.openxmlformats.org/drawingml/2006/main" xmlns:p="http://schemas.openxmlformats.org/presentationml/2006/main" xmlns:r="http://schemas.openxmlformats.org/officeDocument/2006/relationships">
+<p:sld xmlns:a="http://schemas.openxmlformats.org/drawingml/2006/main" xmlns:r="http://schemas.openxmlformats.org/officeDocument/2006/relationships" xmlns:p="http://schemas.openxmlformats.org/presentationml/2006/main">
   <p:cSld>
     <p:bg>
       <p:bgPr>
@@ -7016,7 +7201,14 @@
         <p:cNvGrpSpPr/>
         <p:nvPr/>
       </p:nvGrpSpPr>
-      <p:grpSpPr/>
+      <p:grpSpPr>
+        <a:xfrm>
+          <a:off x="0" y="0"/>
+          <a:ext cx="0" cy="0"/>
+          <a:chOff x="0" y="0"/>
+          <a:chExt cx="0" cy="0"/>
+        </a:xfrm>
+      </p:grpSpPr>
       <p:sp>
         <p:nvSpPr>
           <p:cNvPr id="2" name="Rectangle 1"/>
@@ -7058,6 +7250,7 @@
           <a:lstStyle/>
           <a:p>
             <a:pPr algn="ctr"/>
+            <a:endParaRPr/>
           </a:p>
         </p:txBody>
       </p:sp>
@@ -7289,7 +7482,7 @@
 </file>
 
 <file path=ppt/slides/slide6.xml><?xml version="1.0" encoding="utf-8"?>
-<p:sld xmlns:a="http://schemas.openxmlformats.org/drawingml/2006/main" xmlns:p="http://schemas.openxmlformats.org/presentationml/2006/main" xmlns:r="http://schemas.openxmlformats.org/officeDocument/2006/relationships">
+<p:sld xmlns:a="http://schemas.openxmlformats.org/drawingml/2006/main" xmlns:r="http://schemas.openxmlformats.org/officeDocument/2006/relationships" xmlns:p="http://schemas.openxmlformats.org/presentationml/2006/main">
   <p:cSld>
     <p:bg>
       <p:bgPr>
@@ -7305,7 +7498,14 @@
         <p:cNvGrpSpPr/>
         <p:nvPr/>
       </p:nvGrpSpPr>
-      <p:grpSpPr/>
+      <p:grpSpPr>
+        <a:xfrm>
+          <a:off x="0" y="0"/>
+          <a:ext cx="0" cy="0"/>
+          <a:chOff x="0" y="0"/>
+          <a:chExt cx="0" cy="0"/>
+        </a:xfrm>
+      </p:grpSpPr>
       <p:sp>
         <p:nvSpPr>
           <p:cNvPr id="2" name="Rectangle 1"/>
@@ -7347,6 +7547,7 @@
           <a:lstStyle/>
           <a:p>
             <a:pPr algn="ctr"/>
+            <a:endParaRPr/>
           </a:p>
         </p:txBody>
       </p:sp>
@@ -7495,6 +7696,12 @@
                 <a:spcPct val="115000"/>
               </a:lnSpc>
             </a:pPr>
+            <a:endParaRPr sz="1350" b="0">
+              <a:solidFill>
+                <a:srgbClr val="1C2B21"/>
+              </a:solidFill>
+              <a:latin typeface="Segoe UI"/>
+            </a:endParaRPr>
           </a:p>
           <a:p>
             <a:pPr algn="l">
@@ -7518,6 +7725,12 @@
                 <a:spcPct val="115000"/>
               </a:lnSpc>
             </a:pPr>
+            <a:endParaRPr sz="1350" b="0">
+              <a:solidFill>
+                <a:srgbClr val="1C2B21"/>
+              </a:solidFill>
+              <a:latin typeface="Segoe UI"/>
+            </a:endParaRPr>
           </a:p>
           <a:p>
             <a:pPr algn="l">
@@ -7541,6 +7754,12 @@
                 <a:spcPct val="115000"/>
               </a:lnSpc>
             </a:pPr>
+            <a:endParaRPr sz="1350" b="0">
+              <a:solidFill>
+                <a:srgbClr val="1C2B21"/>
+              </a:solidFill>
+              <a:latin typeface="Segoe UI"/>
+            </a:endParaRPr>
           </a:p>
           <a:p>
             <a:pPr algn="l">
@@ -7647,7 +7866,7 @@
 </file>
 
 <file path=ppt/slides/slide7.xml><?xml version="1.0" encoding="utf-8"?>
-<p:sld xmlns:a="http://schemas.openxmlformats.org/drawingml/2006/main" xmlns:p="http://schemas.openxmlformats.org/presentationml/2006/main" xmlns:r="http://schemas.openxmlformats.org/officeDocument/2006/relationships">
+<p:sld xmlns:a="http://schemas.openxmlformats.org/drawingml/2006/main" xmlns:r="http://schemas.openxmlformats.org/officeDocument/2006/relationships" xmlns:p="http://schemas.openxmlformats.org/presentationml/2006/main">
   <p:cSld>
     <p:bg>
       <p:bgPr>
@@ -7663,7 +7882,14 @@
         <p:cNvGrpSpPr/>
         <p:nvPr/>
       </p:nvGrpSpPr>
-      <p:grpSpPr/>
+      <p:grpSpPr>
+        <a:xfrm>
+          <a:off x="0" y="0"/>
+          <a:ext cx="0" cy="0"/>
+          <a:chOff x="0" y="0"/>
+          <a:chExt cx="0" cy="0"/>
+        </a:xfrm>
+      </p:grpSpPr>
       <p:sp>
         <p:nvSpPr>
           <p:cNvPr id="2" name="Rectangle 1"/>
@@ -7705,6 +7931,7 @@
           <a:lstStyle/>
           <a:p>
             <a:pPr algn="ctr"/>
+            <a:endParaRPr/>
           </a:p>
         </p:txBody>
       </p:sp>
@@ -7853,6 +8080,7 @@
           <a:lstStyle/>
           <a:p>
             <a:pPr algn="ctr"/>
+            <a:endParaRPr/>
           </a:p>
         </p:txBody>
       </p:sp>
@@ -7993,6 +8221,7 @@
           <a:lstStyle/>
           <a:p>
             <a:pPr algn="ctr"/>
+            <a:endParaRPr/>
           </a:p>
         </p:txBody>
       </p:sp>
@@ -8133,6 +8362,7 @@
           <a:lstStyle/>
           <a:p>
             <a:pPr algn="ctr"/>
+            <a:endParaRPr/>
           </a:p>
         </p:txBody>
       </p:sp>
@@ -8317,7 +8547,7 @@
 </file>
 
 <file path=ppt/slides/slide8.xml><?xml version="1.0" encoding="utf-8"?>
-<p:sld xmlns:a="http://schemas.openxmlformats.org/drawingml/2006/main" xmlns:p="http://schemas.openxmlformats.org/presentationml/2006/main" xmlns:r="http://schemas.openxmlformats.org/officeDocument/2006/relationships">
+<p:sld xmlns:a="http://schemas.openxmlformats.org/drawingml/2006/main" xmlns:r="http://schemas.openxmlformats.org/officeDocument/2006/relationships" xmlns:p="http://schemas.openxmlformats.org/presentationml/2006/main">
   <p:cSld>
     <p:bg>
       <p:bgPr>
@@ -8333,7 +8563,14 @@
         <p:cNvGrpSpPr/>
         <p:nvPr/>
       </p:nvGrpSpPr>
-      <p:grpSpPr/>
+      <p:grpSpPr>
+        <a:xfrm>
+          <a:off x="0" y="0"/>
+          <a:ext cx="0" cy="0"/>
+          <a:chOff x="0" y="0"/>
+          <a:chExt cx="0" cy="0"/>
+        </a:xfrm>
+      </p:grpSpPr>
       <p:sp>
         <p:nvSpPr>
           <p:cNvPr id="2" name="Rectangle 1"/>
@@ -8375,6 +8612,7 @@
           <a:lstStyle/>
           <a:p>
             <a:pPr algn="ctr"/>
+            <a:endParaRPr/>
           </a:p>
         </p:txBody>
       </p:sp>
@@ -8523,6 +8761,12 @@
                 <a:spcPct val="120000"/>
               </a:lnSpc>
             </a:pPr>
+            <a:endParaRPr sz="1400" b="0">
+              <a:solidFill>
+                <a:srgbClr val="1C2B21"/>
+              </a:solidFill>
+              <a:latin typeface="Segoe UI"/>
+            </a:endParaRPr>
           </a:p>
           <a:p>
             <a:pPr algn="l">
@@ -8546,6 +8790,12 @@
                 <a:spcPct val="120000"/>
               </a:lnSpc>
             </a:pPr>
+            <a:endParaRPr sz="1400" b="0">
+              <a:solidFill>
+                <a:srgbClr val="1C2B21"/>
+              </a:solidFill>
+              <a:latin typeface="Segoe UI"/>
+            </a:endParaRPr>
           </a:p>
           <a:p>
             <a:pPr algn="l">
@@ -8569,6 +8819,12 @@
                 <a:spcPct val="120000"/>
               </a:lnSpc>
             </a:pPr>
+            <a:endParaRPr sz="1400" b="0">
+              <a:solidFill>
+                <a:srgbClr val="1C2B21"/>
+              </a:solidFill>
+              <a:latin typeface="Segoe UI"/>
+            </a:endParaRPr>
           </a:p>
           <a:p>
             <a:pPr algn="l">
@@ -8592,6 +8848,12 @@
                 <a:spcPct val="120000"/>
               </a:lnSpc>
             </a:pPr>
+            <a:endParaRPr sz="1400" b="0">
+              <a:solidFill>
+                <a:srgbClr val="1C2B21"/>
+              </a:solidFill>
+              <a:latin typeface="Segoe UI"/>
+            </a:endParaRPr>
           </a:p>
           <a:p>
             <a:pPr algn="l">
@@ -8698,7 +8960,7 @@
 </file>
 
 <file path=ppt/slides/slide9.xml><?xml version="1.0" encoding="utf-8"?>
-<p:sld xmlns:a="http://schemas.openxmlformats.org/drawingml/2006/main" xmlns:p="http://schemas.openxmlformats.org/presentationml/2006/main" xmlns:r="http://schemas.openxmlformats.org/officeDocument/2006/relationships">
+<p:sld xmlns:a="http://schemas.openxmlformats.org/drawingml/2006/main" xmlns:r="http://schemas.openxmlformats.org/officeDocument/2006/relationships" xmlns:p="http://schemas.openxmlformats.org/presentationml/2006/main">
   <p:cSld>
     <p:bg>
       <p:bgPr>
@@ -8714,7 +8976,14 @@
         <p:cNvGrpSpPr/>
         <p:nvPr/>
       </p:nvGrpSpPr>
-      <p:grpSpPr/>
+      <p:grpSpPr>
+        <a:xfrm>
+          <a:off x="0" y="0"/>
+          <a:ext cx="0" cy="0"/>
+          <a:chOff x="0" y="0"/>
+          <a:chExt cx="0" cy="0"/>
+        </a:xfrm>
+      </p:grpSpPr>
       <p:sp>
         <p:nvSpPr>
           <p:cNvPr id="2" name="Rectangle 1"/>
@@ -8756,6 +9025,7 @@
           <a:lstStyle/>
           <a:p>
             <a:pPr algn="ctr"/>
+            <a:endParaRPr/>
           </a:p>
         </p:txBody>
       </p:sp>
@@ -9034,6 +9304,7 @@
           <a:lstStyle/>
           <a:p>
             <a:pPr algn="ctr"/>
+            <a:endParaRPr/>
           </a:p>
         </p:txBody>
       </p:sp>
@@ -9234,6 +9505,7 @@
           <a:lstStyle/>
           <a:p>
             <a:pPr algn="ctr"/>
+            <a:endParaRPr/>
           </a:p>
         </p:txBody>
       </p:sp>
@@ -9434,6 +9706,7 @@
           <a:lstStyle/>
           <a:p>
             <a:pPr algn="ctr"/>
+            <a:endParaRPr/>
           </a:p>
         </p:txBody>
       </p:sp>
@@ -9634,6 +9907,7 @@
           <a:lstStyle/>
           <a:p>
             <a:pPr algn="ctr"/>
+            <a:endParaRPr/>
           </a:p>
         </p:txBody>
       </p:sp>
@@ -9834,6 +10108,7 @@
           <a:lstStyle/>
           <a:p>
             <a:pPr algn="ctr"/>
+            <a:endParaRPr/>
           </a:p>
         </p:txBody>
       </p:sp>
@@ -10034,6 +10309,7 @@
           <a:lstStyle/>
           <a:p>
             <a:pPr algn="ctr"/>
+            <a:endParaRPr/>
           </a:p>
         </p:txBody>
       </p:sp>
@@ -10234,6 +10510,7 @@
           <a:lstStyle/>
           <a:p>
             <a:pPr algn="ctr"/>
+            <a:endParaRPr/>
           </a:p>
         </p:txBody>
       </p:sp>
@@ -10434,6 +10711,7 @@
           <a:lstStyle/>
           <a:p>
             <a:pPr algn="ctr"/>
+            <a:endParaRPr/>
           </a:p>
         </p:txBody>
       </p:sp>
@@ -10634,6 +10912,7 @@
           <a:lstStyle/>
           <a:p>
             <a:pPr algn="ctr"/>
+            <a:endParaRPr/>
           </a:p>
         </p:txBody>
       </p:sp>
